--- a/examples/Presentation.pptx
+++ b/examples/Presentation.pptx
@@ -3784,7 +3784,7 @@
                 </a:solidFill>
                 <a:latin typeface="Calibri"/>
               </a:rPr>
-              <a:t>BENCHMARK SECTORIEL</a:t>
+              <a:t>POSITIONNEMENT</a:t>
             </a:r>
           </a:p>
         </p:txBody>
@@ -4715,7 +4715,7 @@
                 </a:solidFill>
                 <a:latin typeface="Calibri"/>
               </a:rPr>
-              <a:t>Mixité des effectifs (cible 40 %)</a:t>
+              <a:t>Indépendance du conseil (seuil 50 %)</a:t>
             </a:r>
           </a:p>
         </p:txBody>
@@ -4750,7 +4750,7 @@
                 </a:solidFill>
                 <a:latin typeface="Calibri"/>
               </a:rPr>
-              <a:t>Index égalité / ESRS S1-9</a:t>
+              <a:t>AFEP-MEDEF</a:t>
             </a:r>
           </a:p>
         </p:txBody>
@@ -4764,189 +4764,6 @@
         <p:spPr>
           <a:xfrm>
             <a:off x="7178040" y="3941064"/>
-            <a:ext cx="1600200" cy="365760"/>
-          </a:xfrm>
-          <a:prstGeom prst="roundRect">
-            <a:avLst/>
-          </a:prstGeom>
-          <a:solidFill>
-            <a:srgbClr val="E74C3C"/>
-          </a:solidFill>
-          <a:ln>
-            <a:noFill/>
-          </a:ln>
-        </p:spPr>
-        <p:style>
-          <a:lnRef idx="1">
-            <a:schemeClr val="accent1"/>
-          </a:lnRef>
-          <a:fillRef idx="3">
-            <a:schemeClr val="accent1"/>
-          </a:fillRef>
-          <a:effectRef idx="2">
-            <a:schemeClr val="accent1"/>
-          </a:effectRef>
-          <a:fontRef idx="minor">
-            <a:schemeClr val="lt1"/>
-          </a:fontRef>
-        </p:style>
-        <p:txBody>
-          <a:bodyPr rtlCol="0" anchor="ctr"/>
-          <a:lstStyle/>
-          <a:p>
-            <a:pPr algn="ctr"/>
-          </a:p>
-        </p:txBody>
-      </p:sp>
-      <p:sp>
-        <p:nvSpPr>
-          <p:cNvPr id="33" name="TextBox 32"/>
-          <p:cNvSpPr txBox="1"/>
-          <p:nvPr/>
-        </p:nvSpPr>
-        <p:spPr>
-          <a:xfrm>
-            <a:off x="7178040" y="3995928"/>
-            <a:ext cx="1600200" cy="274320"/>
-          </a:xfrm>
-          <a:prstGeom prst="rect">
-            <a:avLst/>
-          </a:prstGeom>
-          <a:noFill/>
-        </p:spPr>
-        <p:txBody>
-          <a:bodyPr wrap="square">
-            <a:spAutoFit/>
-          </a:bodyPr>
-          <a:lstStyle/>
-          <a:p>
-            <a:pPr algn="ctr"/>
-            <a:r>
-              <a:rPr sz="1050" b="1" i="0">
-                <a:solidFill>
-                  <a:srgbClr val="FFFFFF"/>
-                </a:solidFill>
-                <a:latin typeface="Calibri"/>
-              </a:rPr>
-              <a:t>Non conforme</a:t>
-            </a:r>
-          </a:p>
-        </p:txBody>
-      </p:sp>
-      <p:sp>
-        <p:nvSpPr>
-          <p:cNvPr id="34" name="TextBox 33"/>
-          <p:cNvSpPr txBox="1"/>
-          <p:nvPr/>
-        </p:nvSpPr>
-        <p:spPr>
-          <a:xfrm>
-            <a:off x="8961120" y="3877056"/>
-            <a:ext cx="2926080" cy="530352"/>
-          </a:xfrm>
-          <a:prstGeom prst="rect">
-            <a:avLst/>
-          </a:prstGeom>
-          <a:noFill/>
-        </p:spPr>
-        <p:txBody>
-          <a:bodyPr wrap="square">
-            <a:spAutoFit/>
-          </a:bodyPr>
-          <a:lstStyle/>
-          <a:p>
-            <a:pPr algn="l"/>
-            <a:r>
-              <a:rPr sz="1000" b="0" i="0">
-                <a:solidFill>
-                  <a:srgbClr val="2C3E50"/>
-                </a:solidFill>
-                <a:latin typeface="Calibri"/>
-              </a:rPr>
-              <a:t>34 % de femmes</a:t>
-            </a:r>
-          </a:p>
-        </p:txBody>
-      </p:sp>
-      <p:sp>
-        <p:nvSpPr>
-          <p:cNvPr id="35" name="TextBox 34"/>
-          <p:cNvSpPr txBox="1"/>
-          <p:nvPr/>
-        </p:nvSpPr>
-        <p:spPr>
-          <a:xfrm>
-            <a:off x="457200" y="4498848"/>
-            <a:ext cx="4846320" cy="502920"/>
-          </a:xfrm>
-          <a:prstGeom prst="rect">
-            <a:avLst/>
-          </a:prstGeom>
-          <a:noFill/>
-        </p:spPr>
-        <p:txBody>
-          <a:bodyPr wrap="square">
-            <a:spAutoFit/>
-          </a:bodyPr>
-          <a:lstStyle/>
-          <a:p>
-            <a:pPr algn="l"/>
-            <a:r>
-              <a:rPr sz="1250" b="1" i="0">
-                <a:solidFill>
-                  <a:srgbClr val="2C3E50"/>
-                </a:solidFill>
-                <a:latin typeface="Calibri"/>
-              </a:rPr>
-              <a:t>Indépendance du conseil (seuil 50 %)</a:t>
-            </a:r>
-          </a:p>
-        </p:txBody>
-      </p:sp>
-      <p:sp>
-        <p:nvSpPr>
-          <p:cNvPr id="36" name="TextBox 35"/>
-          <p:cNvSpPr txBox="1"/>
-          <p:nvPr/>
-        </p:nvSpPr>
-        <p:spPr>
-          <a:xfrm>
-            <a:off x="5349240" y="4581144"/>
-            <a:ext cx="1737360" cy="365760"/>
-          </a:xfrm>
-          <a:prstGeom prst="rect">
-            <a:avLst/>
-          </a:prstGeom>
-          <a:noFill/>
-        </p:spPr>
-        <p:txBody>
-          <a:bodyPr wrap="square">
-            <a:spAutoFit/>
-          </a:bodyPr>
-          <a:lstStyle/>
-          <a:p>
-            <a:pPr algn="l"/>
-            <a:r>
-              <a:rPr sz="1000" b="0" i="0">
-                <a:solidFill>
-                  <a:srgbClr val="6B7C93"/>
-                </a:solidFill>
-                <a:latin typeface="Calibri"/>
-              </a:rPr>
-              <a:t>AFEP-MEDEF</a:t>
-            </a:r>
-          </a:p>
-        </p:txBody>
-      </p:sp>
-      <p:sp>
-        <p:nvSpPr>
-          <p:cNvPr id="37" name="Rounded Rectangle 36"/>
-          <p:cNvSpPr/>
-          <p:nvPr/>
-        </p:nvSpPr>
-        <p:spPr>
-          <a:xfrm>
-            <a:off x="7178040" y="4562856"/>
             <a:ext cx="1600200" cy="365760"/>
           </a:xfrm>
           <a:prstGeom prst="roundRect">
@@ -4983,6 +4800,189 @@
       </p:sp>
       <p:sp>
         <p:nvSpPr>
+          <p:cNvPr id="33" name="TextBox 32"/>
+          <p:cNvSpPr txBox="1"/>
+          <p:nvPr/>
+        </p:nvSpPr>
+        <p:spPr>
+          <a:xfrm>
+            <a:off x="7178040" y="3995928"/>
+            <a:ext cx="1600200" cy="274320"/>
+          </a:xfrm>
+          <a:prstGeom prst="rect">
+            <a:avLst/>
+          </a:prstGeom>
+          <a:noFill/>
+        </p:spPr>
+        <p:txBody>
+          <a:bodyPr wrap="square">
+            <a:spAutoFit/>
+          </a:bodyPr>
+          <a:lstStyle/>
+          <a:p>
+            <a:pPr algn="ctr"/>
+            <a:r>
+              <a:rPr sz="1050" b="1" i="0">
+                <a:solidFill>
+                  <a:srgbClr val="FFFFFF"/>
+                </a:solidFill>
+                <a:latin typeface="Calibri"/>
+              </a:rPr>
+              <a:t>Partiel</a:t>
+            </a:r>
+          </a:p>
+        </p:txBody>
+      </p:sp>
+      <p:sp>
+        <p:nvSpPr>
+          <p:cNvPr id="34" name="TextBox 33"/>
+          <p:cNvSpPr txBox="1"/>
+          <p:nvPr/>
+        </p:nvSpPr>
+        <p:spPr>
+          <a:xfrm>
+            <a:off x="8961120" y="3877056"/>
+            <a:ext cx="2926080" cy="530352"/>
+          </a:xfrm>
+          <a:prstGeom prst="rect">
+            <a:avLst/>
+          </a:prstGeom>
+          <a:noFill/>
+        </p:spPr>
+        <p:txBody>
+          <a:bodyPr wrap="square">
+            <a:spAutoFit/>
+          </a:bodyPr>
+          <a:lstStyle/>
+          <a:p>
+            <a:pPr algn="l"/>
+            <a:r>
+              <a:rPr sz="1000" b="0" i="0">
+                <a:solidFill>
+                  <a:srgbClr val="2C3E50"/>
+                </a:solidFill>
+                <a:latin typeface="Calibri"/>
+              </a:rPr>
+              <a:t>45 % d'administrateurs indépendants</a:t>
+            </a:r>
+          </a:p>
+        </p:txBody>
+      </p:sp>
+      <p:sp>
+        <p:nvSpPr>
+          <p:cNvPr id="35" name="TextBox 34"/>
+          <p:cNvSpPr txBox="1"/>
+          <p:nvPr/>
+        </p:nvSpPr>
+        <p:spPr>
+          <a:xfrm>
+            <a:off x="457200" y="4498848"/>
+            <a:ext cx="4846320" cy="502920"/>
+          </a:xfrm>
+          <a:prstGeom prst="rect">
+            <a:avLst/>
+          </a:prstGeom>
+          <a:noFill/>
+        </p:spPr>
+        <p:txBody>
+          <a:bodyPr wrap="square">
+            <a:spAutoFit/>
+          </a:bodyPr>
+          <a:lstStyle/>
+          <a:p>
+            <a:pPr algn="l"/>
+            <a:r>
+              <a:rPr sz="1250" b="1" i="0">
+                <a:solidFill>
+                  <a:srgbClr val="2C3E50"/>
+                </a:solidFill>
+                <a:latin typeface="Calibri"/>
+              </a:rPr>
+              <a:t>Publication des indicateurs Taxonomie UE</a:t>
+            </a:r>
+          </a:p>
+        </p:txBody>
+      </p:sp>
+      <p:sp>
+        <p:nvSpPr>
+          <p:cNvPr id="36" name="TextBox 35"/>
+          <p:cNvSpPr txBox="1"/>
+          <p:nvPr/>
+        </p:nvSpPr>
+        <p:spPr>
+          <a:xfrm>
+            <a:off x="5349240" y="4581144"/>
+            <a:ext cx="1737360" cy="365760"/>
+          </a:xfrm>
+          <a:prstGeom prst="rect">
+            <a:avLst/>
+          </a:prstGeom>
+          <a:noFill/>
+        </p:spPr>
+        <p:txBody>
+          <a:bodyPr wrap="square">
+            <a:spAutoFit/>
+          </a:bodyPr>
+          <a:lstStyle/>
+          <a:p>
+            <a:pPr algn="l"/>
+            <a:r>
+              <a:rPr sz="1000" b="0" i="0">
+                <a:solidFill>
+                  <a:srgbClr val="6B7C93"/>
+                </a:solidFill>
+                <a:latin typeface="Calibri"/>
+              </a:rPr>
+              <a:t>Règlement (UE) 2020/852</a:t>
+            </a:r>
+          </a:p>
+        </p:txBody>
+      </p:sp>
+      <p:sp>
+        <p:nvSpPr>
+          <p:cNvPr id="37" name="Rounded Rectangle 36"/>
+          <p:cNvSpPr/>
+          <p:nvPr/>
+        </p:nvSpPr>
+        <p:spPr>
+          <a:xfrm>
+            <a:off x="7178040" y="4562856"/>
+            <a:ext cx="1600200" cy="365760"/>
+          </a:xfrm>
+          <a:prstGeom prst="roundRect">
+            <a:avLst/>
+          </a:prstGeom>
+          <a:solidFill>
+            <a:srgbClr val="2E7D32"/>
+          </a:solidFill>
+          <a:ln>
+            <a:noFill/>
+          </a:ln>
+        </p:spPr>
+        <p:style>
+          <a:lnRef idx="1">
+            <a:schemeClr val="accent1"/>
+          </a:lnRef>
+          <a:fillRef idx="3">
+            <a:schemeClr val="accent1"/>
+          </a:fillRef>
+          <a:effectRef idx="2">
+            <a:schemeClr val="accent1"/>
+          </a:effectRef>
+          <a:fontRef idx="minor">
+            <a:schemeClr val="lt1"/>
+          </a:fontRef>
+        </p:style>
+        <p:txBody>
+          <a:bodyPr rtlCol="0" anchor="ctr"/>
+          <a:lstStyle/>
+          <a:p>
+            <a:pPr algn="ctr"/>
+          </a:p>
+        </p:txBody>
+      </p:sp>
+      <p:sp>
+        <p:nvSpPr>
           <p:cNvPr id="38" name="TextBox 37"/>
           <p:cNvSpPr txBox="1"/>
           <p:nvPr/>
@@ -5011,7 +5011,7 @@
                 </a:solidFill>
                 <a:latin typeface="Calibri"/>
               </a:rPr>
-              <a:t>Partiel</a:t>
+              <a:t>Conforme</a:t>
             </a:r>
           </a:p>
         </p:txBody>
@@ -5046,7 +5046,7 @@
                 </a:solidFill>
                 <a:latin typeface="Calibri"/>
               </a:rPr>
-              <a:t>45 % d'administrateurs indépendants</a:t>
+              <a:t>Parts alignées publiées (CA/CapEx/OpEx)</a:t>
             </a:r>
           </a:p>
         </p:txBody>
@@ -5124,7 +5124,7 @@
                 </a:solidFill>
                 <a:latin typeface="Calibri"/>
               </a:rPr>
-              <a:t>Publication des indicateurs Taxonomie UE</a:t>
+              <a:t>Objectifs climatiques chiffrés</a:t>
             </a:r>
           </a:p>
         </p:txBody>
@@ -5159,7 +5159,7 @@
                 </a:solidFill>
                 <a:latin typeface="Calibri"/>
               </a:rPr>
-              <a:t>Règlement (UE) 2020/852</a:t>
+              <a:t>ESRS E1-4</a:t>
             </a:r>
           </a:p>
         </p:txBody>
@@ -5272,7 +5272,7 @@
                 </a:solidFill>
                 <a:latin typeface="Calibri"/>
               </a:rPr>
-              <a:t>Parts alignées publiées (CA/CapEx/OpEx)</a:t>
+              <a:t>Trajectoire -42 % à 2030 définie (réf. SBTi)</a:t>
             </a:r>
           </a:p>
         </p:txBody>
@@ -5280,189 +5280,6 @@
       <p:sp>
         <p:nvSpPr>
           <p:cNvPr id="46" name="TextBox 45"/>
-          <p:cNvSpPr txBox="1"/>
-          <p:nvPr/>
-        </p:nvSpPr>
-        <p:spPr>
-          <a:xfrm>
-            <a:off x="457200" y="5742432"/>
-            <a:ext cx="4846320" cy="502920"/>
-          </a:xfrm>
-          <a:prstGeom prst="rect">
-            <a:avLst/>
-          </a:prstGeom>
-          <a:noFill/>
-        </p:spPr>
-        <p:txBody>
-          <a:bodyPr wrap="square">
-            <a:spAutoFit/>
-          </a:bodyPr>
-          <a:lstStyle/>
-          <a:p>
-            <a:pPr algn="l"/>
-            <a:r>
-              <a:rPr sz="1250" b="1" i="0">
-                <a:solidFill>
-                  <a:srgbClr val="2C3E50"/>
-                </a:solidFill>
-                <a:latin typeface="Calibri"/>
-              </a:rPr>
-              <a:t>Objectifs climatiques chiffrés</a:t>
-            </a:r>
-          </a:p>
-        </p:txBody>
-      </p:sp>
-      <p:sp>
-        <p:nvSpPr>
-          <p:cNvPr id="47" name="TextBox 46"/>
-          <p:cNvSpPr txBox="1"/>
-          <p:nvPr/>
-        </p:nvSpPr>
-        <p:spPr>
-          <a:xfrm>
-            <a:off x="5349240" y="5824728"/>
-            <a:ext cx="1737360" cy="365760"/>
-          </a:xfrm>
-          <a:prstGeom prst="rect">
-            <a:avLst/>
-          </a:prstGeom>
-          <a:noFill/>
-        </p:spPr>
-        <p:txBody>
-          <a:bodyPr wrap="square">
-            <a:spAutoFit/>
-          </a:bodyPr>
-          <a:lstStyle/>
-          <a:p>
-            <a:pPr algn="l"/>
-            <a:r>
-              <a:rPr sz="1000" b="0" i="0">
-                <a:solidFill>
-                  <a:srgbClr val="6B7C93"/>
-                </a:solidFill>
-                <a:latin typeface="Calibri"/>
-              </a:rPr>
-              <a:t>ESRS E1-4</a:t>
-            </a:r>
-          </a:p>
-        </p:txBody>
-      </p:sp>
-      <p:sp>
-        <p:nvSpPr>
-          <p:cNvPr id="48" name="Rounded Rectangle 47"/>
-          <p:cNvSpPr/>
-          <p:nvPr/>
-        </p:nvSpPr>
-        <p:spPr>
-          <a:xfrm>
-            <a:off x="7178040" y="5806440"/>
-            <a:ext cx="1600200" cy="365760"/>
-          </a:xfrm>
-          <a:prstGeom prst="roundRect">
-            <a:avLst/>
-          </a:prstGeom>
-          <a:solidFill>
-            <a:srgbClr val="2E7D32"/>
-          </a:solidFill>
-          <a:ln>
-            <a:noFill/>
-          </a:ln>
-        </p:spPr>
-        <p:style>
-          <a:lnRef idx="1">
-            <a:schemeClr val="accent1"/>
-          </a:lnRef>
-          <a:fillRef idx="3">
-            <a:schemeClr val="accent1"/>
-          </a:fillRef>
-          <a:effectRef idx="2">
-            <a:schemeClr val="accent1"/>
-          </a:effectRef>
-          <a:fontRef idx="minor">
-            <a:schemeClr val="lt1"/>
-          </a:fontRef>
-        </p:style>
-        <p:txBody>
-          <a:bodyPr rtlCol="0" anchor="ctr"/>
-          <a:lstStyle/>
-          <a:p>
-            <a:pPr algn="ctr"/>
-          </a:p>
-        </p:txBody>
-      </p:sp>
-      <p:sp>
-        <p:nvSpPr>
-          <p:cNvPr id="49" name="TextBox 48"/>
-          <p:cNvSpPr txBox="1"/>
-          <p:nvPr/>
-        </p:nvSpPr>
-        <p:spPr>
-          <a:xfrm>
-            <a:off x="7178040" y="5861304"/>
-            <a:ext cx="1600200" cy="274320"/>
-          </a:xfrm>
-          <a:prstGeom prst="rect">
-            <a:avLst/>
-          </a:prstGeom>
-          <a:noFill/>
-        </p:spPr>
-        <p:txBody>
-          <a:bodyPr wrap="square">
-            <a:spAutoFit/>
-          </a:bodyPr>
-          <a:lstStyle/>
-          <a:p>
-            <a:pPr algn="ctr"/>
-            <a:r>
-              <a:rPr sz="1050" b="1" i="0">
-                <a:solidFill>
-                  <a:srgbClr val="FFFFFF"/>
-                </a:solidFill>
-                <a:latin typeface="Calibri"/>
-              </a:rPr>
-              <a:t>Conforme</a:t>
-            </a:r>
-          </a:p>
-        </p:txBody>
-      </p:sp>
-      <p:sp>
-        <p:nvSpPr>
-          <p:cNvPr id="50" name="TextBox 49"/>
-          <p:cNvSpPr txBox="1"/>
-          <p:nvPr/>
-        </p:nvSpPr>
-        <p:spPr>
-          <a:xfrm>
-            <a:off x="8961120" y="5742432"/>
-            <a:ext cx="2926080" cy="530352"/>
-          </a:xfrm>
-          <a:prstGeom prst="rect">
-            <a:avLst/>
-          </a:prstGeom>
-          <a:noFill/>
-        </p:spPr>
-        <p:txBody>
-          <a:bodyPr wrap="square">
-            <a:spAutoFit/>
-          </a:bodyPr>
-          <a:lstStyle/>
-          <a:p>
-            <a:pPr algn="l"/>
-            <a:r>
-              <a:rPr sz="1000" b="0" i="0">
-                <a:solidFill>
-                  <a:srgbClr val="2C3E50"/>
-                </a:solidFill>
-                <a:latin typeface="Calibri"/>
-              </a:rPr>
-              <a:t>Trajectoire -42 % à 2030 définie (réf. SBTi)</a:t>
-            </a:r>
-          </a:p>
-        </p:txBody>
-      </p:sp>
-      <p:sp>
-        <p:nvSpPr>
-          <p:cNvPr id="51" name="TextBox 50"/>
           <p:cNvSpPr txBox="1"/>
           <p:nvPr/>
         </p:nvSpPr>
@@ -10254,7 +10071,7 @@
                 </a:solidFill>
                 <a:latin typeface="Calibri"/>
               </a:rPr>
-              <a:t>DOUBLE MATÉRIALITÉ — CSRD / ESRS</a:t>
+              <a:t>PRIORISATION DES ENJEUX ESG</a:t>
             </a:r>
           </a:p>
         </p:txBody>
@@ -10471,7 +10288,7 @@
                 </a:solidFill>
                 <a:latin typeface="Calibri"/>
               </a:rPr>
-              <a:t>Enjeux ESG positionnés selon leur impact et leur importance financière. Le quadrant supérieur droit concentre les priorités stratégiques.</a:t>
+              <a:t>Enjeux positionnés selon leur exposition estimée et leur sensibilité économique, à partir des données déclarées.</a:t>
             </a:r>
           </a:p>
         </p:txBody>
@@ -12628,7 +12445,7 @@
                 </a:solidFill>
                 <a:latin typeface="Calibri"/>
               </a:rPr>
-              <a:t>Déséquilibre de genre dans les effectifs (34% femmes — objectif 40%)</a:t>
+              <a:t>Déséquilibre de genre dans les effectifs (34% de femmes)</a:t>
             </a:r>
           </a:p>
         </p:txBody>
@@ -16359,7 +16176,7 @@
                 </a:solidFill>
                 <a:latin typeface="Calibri"/>
               </a:rPr>
-              <a:t>Renforce la diversité et la conformité (loi Rixain, transparence salariale UE) ; améliore l'attractivité employeur.  —  Direction des ressources humaines</a:t>
+              <a:t>Renforce la diversité des équipes et l'attractivité employeur ; améliore la fidélisation des talents.  —  Direction des ressources humaines</a:t>
             </a:r>
           </a:p>
         </p:txBody>
@@ -21133,7 +20950,7 @@
                 </a:solidFill>
                 <a:latin typeface="Calibri"/>
               </a:rPr>
-              <a:t>—  Benchmark Sectoriel</a:t>
+              <a:t>—  Positionnement</a:t>
             </a:r>
           </a:p>
         </p:txBody>
@@ -23341,7 +23158,7 @@
                 </a:solidFill>
                 <a:latin typeface="Calibri"/>
               </a:rPr>
-              <a:t>BENCHMARK SECTORIEL</a:t>
+              <a:t>POSITIONNEMENT</a:t>
             </a:r>
           </a:p>
         </p:txBody>
@@ -23370,13 +23187,13 @@
           <a:p>
             <a:pPr algn="l"/>
             <a:r>
-              <a:rPr sz="2028" b="1" i="0">
+              <a:rPr sz="1716" b="1" i="0">
                 <a:solidFill>
                   <a:srgbClr val="FFFFFF"/>
                 </a:solidFill>
                 <a:latin typeface="Calibri"/>
               </a:rPr>
-              <a:t>Acme Industries surperforme son secteur de 11 points</a:t>
+              <a:t>La gouvernance est le point fort d'Acme Industries, le social sa priorité</a:t>
             </a:r>
           </a:p>
         </p:txBody>
@@ -23558,7 +23375,7 @@
                 </a:solidFill>
                 <a:latin typeface="Calibri"/>
               </a:rPr>
-              <a:t>Votre avance se joue sur l'environnement (+18 pts vs secteur) ; le social (-1 pts) est l'écart à combler en priorité.</a:t>
+              <a:t>20 points séparent votre pilier le plus solide du plus fragile — l'écart interne à réduire en priorité.</a:t>
             </a:r>
           </a:p>
         </p:txBody>
@@ -24071,41 +23888,6 @@
       <p:sp>
         <p:nvSpPr>
           <p:cNvPr id="25" name="TextBox 24"/>
-          <p:cNvSpPr txBox="1"/>
-          <p:nvPr/>
-        </p:nvSpPr>
-        <p:spPr>
-          <a:xfrm>
-            <a:off x="365760" y="6355080"/>
-            <a:ext cx="6858000" cy="320040"/>
-          </a:xfrm>
-          <a:prstGeom prst="rect">
-            <a:avLst/>
-          </a:prstGeom>
-          <a:noFill/>
-        </p:spPr>
-        <p:txBody>
-          <a:bodyPr wrap="square">
-            <a:spAutoFit/>
-          </a:bodyPr>
-          <a:lstStyle/>
-          <a:p>
-            <a:pPr algn="l"/>
-            <a:r>
-              <a:rPr sz="900" b="0" i="1">
-                <a:solidFill>
-                  <a:srgbClr val="6B7C93"/>
-                </a:solidFill>
-                <a:latin typeface="Calibri"/>
-              </a:rPr>
-              <a:t>Référence sectorielle interne — marché ETI/PME.</a:t>
-            </a:r>
-          </a:p>
-        </p:txBody>
-      </p:sp>
-      <p:sp>
-        <p:nvSpPr>
-          <p:cNvPr id="26" name="TextBox 25"/>
           <p:cNvSpPr txBox="1"/>
           <p:nvPr/>
         </p:nvSpPr>

--- a/examples/Presentation.pptx
+++ b/examples/Presentation.pptx
@@ -7014,7 +7014,7 @@
                 </a:solidFill>
                 <a:latin typeface="Calibri"/>
               </a:rPr>
-              <a:t>Performance environnementale solide, au-dessus de la moyenne sectorielle ; l'intensité carbone reste le principal levier de création de valeur durable.</a:t>
+              <a:t>Performance environnementale solide ; l'intensité carbone reste le principal levier de création de valeur durable.</a:t>
             </a:r>
           </a:p>
         </p:txBody>
@@ -12523,7 +12523,7 @@
                 </a:solidFill>
                 <a:latin typeface="Calibri"/>
               </a:rPr>
-              <a:t>Taux d'accidents supérieur aux standards sectoriels (TF 6.2)</a:t>
+              <a:t>Taux de fréquence des accidents élevé (TF 6.2)</a:t>
             </a:r>
           </a:p>
         </p:txBody>
@@ -13514,7 +13514,7 @@
                 </a:solidFill>
                 <a:latin typeface="Calibri"/>
               </a:rPr>
-              <a:t>Sinistralité au-dessus des standards : risque humain et social</a:t>
+              <a:t>Sinistralité élevée : risque humain et social</a:t>
             </a:r>
           </a:p>
         </p:txBody>

--- a/examples/Presentation.pptx
+++ b/examples/Presentation.pptx
@@ -21473,7 +21473,7 @@
         <p:spPr>
           <a:xfrm>
             <a:off x="320040" y="1554480"/>
-            <a:ext cx="6858000" cy="4219827"/>
+            <a:ext cx="6858000" cy="4213575"/>
           </a:xfrm>
           <a:prstGeom prst="rect">
             <a:avLst/>

--- a/examples/Presentation.pptx
+++ b/examples/Presentation.pptx
@@ -21473,7 +21473,7 @@
         <p:spPr>
           <a:xfrm>
             <a:off x="320040" y="1554480"/>
-            <a:ext cx="6858000" cy="4213575"/>
+            <a:ext cx="6858000" cy="4219827"/>
           </a:xfrm>
           <a:prstGeom prst="rect">
             <a:avLst/>

--- a/examples/Presentation.pptx
+++ b/examples/Presentation.pptx
@@ -3817,7 +3817,7 @@
                 </a:solidFill>
                 <a:latin typeface="Calibri"/>
               </a:rPr>
-              <a:t>Analyse des écarts réglementaires</a:t>
+              <a:t>Couverture des exigences de reporting</a:t>
             </a:r>
           </a:p>
         </p:txBody>
@@ -3950,7 +3950,7 @@
             <a:avLst/>
           </a:prstGeom>
           <a:solidFill>
-            <a:srgbClr val="2E7D32"/>
+            <a:srgbClr val="37474F"/>
           </a:solidFill>
           <a:ln>
             <a:noFill/>
@@ -4008,7 +4008,7 @@
                 </a:solidFill>
                 <a:latin typeface="Calibri"/>
               </a:rPr>
-              <a:t>Conforme</a:t>
+              <a:t>Publié</a:t>
             </a:r>
           </a:p>
         </p:txBody>
@@ -4133,7 +4133,7 @@
             <a:avLst/>
           </a:prstGeom>
           <a:solidFill>
-            <a:srgbClr val="2E7D32"/>
+            <a:srgbClr val="37474F"/>
           </a:solidFill>
           <a:ln>
             <a:noFill/>
@@ -4191,7 +4191,7 @@
                 </a:solidFill>
                 <a:latin typeface="Calibri"/>
               </a:rPr>
-              <a:t>Conforme</a:t>
+              <a:t>Publié</a:t>
             </a:r>
           </a:p>
         </p:txBody>
@@ -4417,7 +4417,7 @@
                 </a:solidFill>
                 <a:latin typeface="Calibri"/>
               </a:rPr>
-              <a:t>Non conforme</a:t>
+              <a:t>Non publié</a:t>
             </a:r>
           </a:p>
         </p:txBody>
@@ -4542,7 +4542,7 @@
             <a:avLst/>
           </a:prstGeom>
           <a:solidFill>
-            <a:srgbClr val="2E7D32"/>
+            <a:srgbClr val="37474F"/>
           </a:solidFill>
           <a:ln>
             <a:noFill/>
@@ -4600,7 +4600,7 @@
                 </a:solidFill>
                 <a:latin typeface="Calibri"/>
               </a:rPr>
-              <a:t>Conforme</a:t>
+              <a:t>Publié</a:t>
             </a:r>
           </a:p>
         </p:txBody>
@@ -4713,7 +4713,7 @@
                 </a:solidFill>
                 <a:latin typeface="Calibri"/>
               </a:rPr>
-              <a:t>Indépendance du conseil (seuil 50 %)</a:t>
+              <a:t>Indépendance du conseil (AFEP-MEDEF, appliquer ou expliquer)</a:t>
             </a:r>
           </a:p>
         </p:txBody>
@@ -4826,7 +4826,7 @@
                 </a:solidFill>
                 <a:latin typeface="Calibri"/>
               </a:rPr>
-              <a:t>Partiel</a:t>
+              <a:t>Sous le seuil</a:t>
             </a:r>
           </a:p>
         </p:txBody>
@@ -4951,7 +4951,7 @@
             <a:avLst/>
           </a:prstGeom>
           <a:solidFill>
-            <a:srgbClr val="2E7D32"/>
+            <a:srgbClr val="37474F"/>
           </a:solidFill>
           <a:ln>
             <a:noFill/>
@@ -5009,7 +5009,7 @@
                 </a:solidFill>
                 <a:latin typeface="Calibri"/>
               </a:rPr>
-              <a:t>Conforme</a:t>
+              <a:t>Publié</a:t>
             </a:r>
           </a:p>
         </p:txBody>
@@ -5235,7 +5235,7 @@
                 </a:solidFill>
                 <a:latin typeface="Calibri"/>
               </a:rPr>
-              <a:t>Non renseigné</a:t>
+              <a:t>Non couvert par ce reporting</a:t>
             </a:r>
           </a:p>
         </p:txBody>
@@ -21473,7 +21473,7 @@
         <p:spPr>
           <a:xfrm>
             <a:off x="320040" y="1554480"/>
-            <a:ext cx="6858000" cy="4219827"/>
+            <a:ext cx="6858000" cy="4213575"/>
           </a:xfrm>
           <a:prstGeom prst="rect">
             <a:avLst/>
